--- a/reports/2026-10-24/YouTube_AI趨勢研究雷達_2026-10-24_簡報.pptx
+++ b/reports/2026-10-24/YouTube_AI趨勢研究雷達_2026-10-24_簡報.pptx
@@ -3192,12 +3192,12 @@
           <a:lstStyle/>
           <a:p>
             <a:r>
-              <a:t>近72h去重樣本：39</a:t>
-            </a:r>
-          </a:p>
-          <a:p>
-            <a:r>
-              <a:t>固定查詢：AI賺錢, AI副業</a:t>
+              <a:t>近72h去重樣本：40</a:t>
+            </a:r>
+          </a:p>
+          <a:p>
+            <a:r>
+              <a:t>固定查詢：AI副業, AI賺錢</a:t>
             </a:r>
           </a:p>
         </p:txBody>
@@ -3257,37 +3257,37 @@
           <a:lstStyle/>
           <a:p>
             <a:r>
-              <a:t>1. AI助理争夺战：解析Muse、Grok Bot与Instinct背后的产品布局、入口生意与盈利难题｜77,671</a:t>
-            </a:r>
-          </a:p>
-          <a:p>
-            <a:r>
-              <a:t>2. 2026/10/21(三) SpaceX 真的靠AI賺錢了？#SPCX｜37,727</a:t>
-            </a:r>
-          </a:p>
-          <a:p>
-            <a:r>
-              <a:t>3. SpaceX 財報拆解：賺了 44 億，為什麼華爾街還吵成兩派？｜24,746</a:t>
-            </a:r>
-          </a:p>
-          <a:p>
-            <a:r>
-              <a:t>4. 【簡単すぎるで！】最短で収益化して月20万までいけちゃう在宅副業はこれ一択です！【AI副業】【スマホ副業】｜23,118</a:t>
-            </a:r>
-          </a:p>
-          <a:p>
-            <a:r>
-              <a:t>5. 【2026年10月】予算ごとに課金すべきAIを徹底解説します！｜16,320</a:t>
-            </a:r>
-          </a:p>
-          <a:p>
-            <a:r>
-              <a:t>6. 唱衰 AI 不賺錢的，全被黃仁勳在GTC大會給打臉了！#紀緯明 #小明老師 #投資明明很簡單 #台股 #黃仁勳｜15,185</a:t>
-            </a:r>
-          </a:p>
-          <a:p>
-            <a:r>
-              <a:t>7. 我把热门视频里的赚钱skill复刻出来了#豆包工作 #豆包agent #豆包来财 #大学生创业 #当年轻人用A｜14,960</a:t>
+              <a:t>1. 7 Proven Ways to Make Money With AI (No Experience)｜226,253</a:t>
+            </a:r>
+          </a:p>
+          <a:p>
+            <a:r>
+              <a:t>2. AI助理争夺战：解析Muse、Grok Bot与Instinct背后的产品布局、入口生意与盈利难题｜99,147</a:t>
+            </a:r>
+          </a:p>
+          <a:p>
+            <a:r>
+              <a:t>3. 我把热门视频里的赚钱skill复刻出来了#豆包工作 #豆包agent #豆包来财 #大学生创业 #当年轻人用A｜25,878</a:t>
+            </a:r>
+          </a:p>
+          <a:p>
+            <a:r>
+              <a:t>4. 唱衰 AI 不賺錢的，全被黃仁勳在GTC大會給打臉了！#紀緯明 #小明老師 #投資明明很簡單 #台股 #黃仁勳｜16,473</a:t>
+            </a:r>
+          </a:p>
+          <a:p>
+            <a:r>
+              <a:t>5. 梁文峰是真想教你赚钱！前脚美国全面拉黑DeepSeek，后脚梁文峰直接开源推理框架 #ai #DeepSeek｜7,683</a:t>
+            </a:r>
+          </a:p>
+          <a:p>
+            <a:r>
+              <a:t>6. 【AI 副業】寝る前30分でガチで稼げる！初心者向けの副業はこれ一択｜7,455</a:t>
+            </a:r>
+          </a:p>
+          <a:p>
+            <a:r>
+              <a:t>7. 【2027年最新】Claude Codeを使って月30万を狙える穴場のAI副業TOP3【AI副業を実演】｜7,088</a:t>
             </a:r>
           </a:p>
         </p:txBody>
@@ -3609,7 +3609,7 @@
         <p:spPr>
           <a:xfrm>
             <a:off x="548640" y="1005840"/>
-            <a:ext cx="8046720" cy="7272908"/>
+            <a:ext cx="8046720" cy="7297973"/>
           </a:xfrm>
           <a:prstGeom prst="rect">
             <a:avLst/>
